--- a/Week6/week6 Basic Concepts for Neural Networks.pptx
+++ b/Week6/week6 Basic Concepts for Neural Networks.pptx
@@ -270,7 +270,7 @@
           <a:p>
             <a:fld id="{D9D2A4DD-E6C5-4446-8814-DDCEAB64F4E0}" type="datetimeFigureOut">
               <a:rPr lang="ko-KR" altLang="en-US" smtClean="0"/>
-              <a:t>2024-04-09</a:t>
+              <a:t>2025-04-07</a:t>
             </a:fld>
             <a:endParaRPr lang="ko-KR" altLang="en-US"/>
           </a:p>
@@ -435,7 +435,7 @@
           <a:p>
             <a:fld id="{BF4D36B7-6BC9-4358-A9C9-63F4AFA82B46}" type="datetimeFigureOut">
               <a:rPr lang="ko-KR" altLang="en-US" smtClean="0"/>
-              <a:t>2024-04-09</a:t>
+              <a:t>2025-04-07</a:t>
             </a:fld>
             <a:endParaRPr lang="ko-KR" altLang="en-US"/>
           </a:p>
@@ -757,7 +757,7 @@
             <a:spLocks noGrp="1"/>
           </p:cNvSpPr>
           <p:nvPr>
-            <p:ph type="sldNum" sz="quarter" idx="10"/>
+            <p:ph type="sldNum" sz="quarter" idx="5"/>
           </p:nvPr>
         </p:nvSpPr>
         <p:spPr/>
@@ -767,7 +767,7 @@
           <a:p>
             <a:fld id="{AE7DD7B4-6F0D-4FE3-8660-A7DE31D2AD67}" type="slidenum">
               <a:rPr lang="ko-KR" altLang="en-US" smtClean="0"/>
-              <a:t>2</a:t>
+              <a:t>1</a:t>
             </a:fld>
             <a:endParaRPr lang="ko-KR" altLang="en-US"/>
           </a:p>
@@ -776,7 +776,7 @@
     </p:spTree>
     <p:extLst>
       <p:ext uri="{BB962C8B-B14F-4D97-AF65-F5344CB8AC3E}">
-        <p14:creationId xmlns:p14="http://schemas.microsoft.com/office/powerpoint/2010/main" val="2782314945"/>
+        <p14:creationId xmlns:p14="http://schemas.microsoft.com/office/powerpoint/2010/main" val="2327556008"/>
       </p:ext>
     </p:extLst>
   </p:cSld>
@@ -851,7 +851,7 @@
           <a:p>
             <a:fld id="{AE7DD7B4-6F0D-4FE3-8660-A7DE31D2AD67}" type="slidenum">
               <a:rPr lang="ko-KR" altLang="en-US" smtClean="0"/>
-              <a:t>11</a:t>
+              <a:t>10</a:t>
             </a:fld>
             <a:endParaRPr lang="ko-KR" altLang="en-US"/>
           </a:p>
@@ -860,7 +860,7 @@
     </p:spTree>
     <p:extLst>
       <p:ext uri="{BB962C8B-B14F-4D97-AF65-F5344CB8AC3E}">
-        <p14:creationId xmlns:p14="http://schemas.microsoft.com/office/powerpoint/2010/main" val="1809004997"/>
+        <p14:creationId xmlns:p14="http://schemas.microsoft.com/office/powerpoint/2010/main" val="4155317091"/>
       </p:ext>
     </p:extLst>
   </p:cSld>
@@ -935,7 +935,7 @@
           <a:p>
             <a:fld id="{AE7DD7B4-6F0D-4FE3-8660-A7DE31D2AD67}" type="slidenum">
               <a:rPr lang="ko-KR" altLang="en-US" smtClean="0"/>
-              <a:t>12</a:t>
+              <a:t>11</a:t>
             </a:fld>
             <a:endParaRPr lang="ko-KR" altLang="en-US"/>
           </a:p>
@@ -944,7 +944,7 @@
     </p:spTree>
     <p:extLst>
       <p:ext uri="{BB962C8B-B14F-4D97-AF65-F5344CB8AC3E}">
-        <p14:creationId xmlns:p14="http://schemas.microsoft.com/office/powerpoint/2010/main" val="1950030422"/>
+        <p14:creationId xmlns:p14="http://schemas.microsoft.com/office/powerpoint/2010/main" val="1809004997"/>
       </p:ext>
     </p:extLst>
   </p:cSld>
@@ -1019,7 +1019,7 @@
           <a:p>
             <a:fld id="{AE7DD7B4-6F0D-4FE3-8660-A7DE31D2AD67}" type="slidenum">
               <a:rPr lang="ko-KR" altLang="en-US" smtClean="0"/>
-              <a:t>13</a:t>
+              <a:t>12</a:t>
             </a:fld>
             <a:endParaRPr lang="ko-KR" altLang="en-US"/>
           </a:p>
@@ -1028,7 +1028,7 @@
     </p:spTree>
     <p:extLst>
       <p:ext uri="{BB962C8B-B14F-4D97-AF65-F5344CB8AC3E}">
-        <p14:creationId xmlns:p14="http://schemas.microsoft.com/office/powerpoint/2010/main" val="3831578536"/>
+        <p14:creationId xmlns:p14="http://schemas.microsoft.com/office/powerpoint/2010/main" val="1950030422"/>
       </p:ext>
     </p:extLst>
   </p:cSld>
@@ -1103,7 +1103,7 @@
           <a:p>
             <a:fld id="{AE7DD7B4-6F0D-4FE3-8660-A7DE31D2AD67}" type="slidenum">
               <a:rPr lang="ko-KR" altLang="en-US" smtClean="0"/>
-              <a:t>14</a:t>
+              <a:t>13</a:t>
             </a:fld>
             <a:endParaRPr lang="ko-KR" altLang="en-US"/>
           </a:p>
@@ -1112,7 +1112,7 @@
     </p:spTree>
     <p:extLst>
       <p:ext uri="{BB962C8B-B14F-4D97-AF65-F5344CB8AC3E}">
-        <p14:creationId xmlns:p14="http://schemas.microsoft.com/office/powerpoint/2010/main" val="4236372587"/>
+        <p14:creationId xmlns:p14="http://schemas.microsoft.com/office/powerpoint/2010/main" val="3831578536"/>
       </p:ext>
     </p:extLst>
   </p:cSld>
@@ -1187,7 +1187,7 @@
           <a:p>
             <a:fld id="{AE7DD7B4-6F0D-4FE3-8660-A7DE31D2AD67}" type="slidenum">
               <a:rPr lang="ko-KR" altLang="en-US" smtClean="0"/>
-              <a:t>15</a:t>
+              <a:t>14</a:t>
             </a:fld>
             <a:endParaRPr lang="ko-KR" altLang="en-US"/>
           </a:p>
@@ -1196,7 +1196,7 @@
     </p:spTree>
     <p:extLst>
       <p:ext uri="{BB962C8B-B14F-4D97-AF65-F5344CB8AC3E}">
-        <p14:creationId xmlns:p14="http://schemas.microsoft.com/office/powerpoint/2010/main" val="378458806"/>
+        <p14:creationId xmlns:p14="http://schemas.microsoft.com/office/powerpoint/2010/main" val="4236372587"/>
       </p:ext>
     </p:extLst>
   </p:cSld>
@@ -1271,7 +1271,7 @@
           <a:p>
             <a:fld id="{AE7DD7B4-6F0D-4FE3-8660-A7DE31D2AD67}" type="slidenum">
               <a:rPr lang="ko-KR" altLang="en-US" smtClean="0"/>
-              <a:t>16</a:t>
+              <a:t>15</a:t>
             </a:fld>
             <a:endParaRPr lang="ko-KR" altLang="en-US"/>
           </a:p>
@@ -1280,7 +1280,7 @@
     </p:spTree>
     <p:extLst>
       <p:ext uri="{BB962C8B-B14F-4D97-AF65-F5344CB8AC3E}">
-        <p14:creationId xmlns:p14="http://schemas.microsoft.com/office/powerpoint/2010/main" val="1928233158"/>
+        <p14:creationId xmlns:p14="http://schemas.microsoft.com/office/powerpoint/2010/main" val="378458806"/>
       </p:ext>
     </p:extLst>
   </p:cSld>
@@ -1355,7 +1355,7 @@
           <a:p>
             <a:fld id="{AE7DD7B4-6F0D-4FE3-8660-A7DE31D2AD67}" type="slidenum">
               <a:rPr lang="ko-KR" altLang="en-US" smtClean="0"/>
-              <a:t>17</a:t>
+              <a:t>16</a:t>
             </a:fld>
             <a:endParaRPr lang="ko-KR" altLang="en-US"/>
           </a:p>
@@ -1364,7 +1364,7 @@
     </p:spTree>
     <p:extLst>
       <p:ext uri="{BB962C8B-B14F-4D97-AF65-F5344CB8AC3E}">
-        <p14:creationId xmlns:p14="http://schemas.microsoft.com/office/powerpoint/2010/main" val="3630348192"/>
+        <p14:creationId xmlns:p14="http://schemas.microsoft.com/office/powerpoint/2010/main" val="1928233158"/>
       </p:ext>
     </p:extLst>
   </p:cSld>
@@ -1439,7 +1439,7 @@
           <a:p>
             <a:fld id="{AE7DD7B4-6F0D-4FE3-8660-A7DE31D2AD67}" type="slidenum">
               <a:rPr lang="ko-KR" altLang="en-US" smtClean="0"/>
-              <a:t>18</a:t>
+              <a:t>17</a:t>
             </a:fld>
             <a:endParaRPr lang="ko-KR" altLang="en-US"/>
           </a:p>
@@ -1448,7 +1448,7 @@
     </p:spTree>
     <p:extLst>
       <p:ext uri="{BB962C8B-B14F-4D97-AF65-F5344CB8AC3E}">
-        <p14:creationId xmlns:p14="http://schemas.microsoft.com/office/powerpoint/2010/main" val="4094884803"/>
+        <p14:creationId xmlns:p14="http://schemas.microsoft.com/office/powerpoint/2010/main" val="3630348192"/>
       </p:ext>
     </p:extLst>
   </p:cSld>
@@ -1523,7 +1523,7 @@
           <a:p>
             <a:fld id="{AE7DD7B4-6F0D-4FE3-8660-A7DE31D2AD67}" type="slidenum">
               <a:rPr lang="ko-KR" altLang="en-US" smtClean="0"/>
-              <a:t>19</a:t>
+              <a:t>18</a:t>
             </a:fld>
             <a:endParaRPr lang="ko-KR" altLang="en-US"/>
           </a:p>
@@ -1532,7 +1532,7 @@
     </p:spTree>
     <p:extLst>
       <p:ext uri="{BB962C8B-B14F-4D97-AF65-F5344CB8AC3E}">
-        <p14:creationId xmlns:p14="http://schemas.microsoft.com/office/powerpoint/2010/main" val="1577024467"/>
+        <p14:creationId xmlns:p14="http://schemas.microsoft.com/office/powerpoint/2010/main" val="4094884803"/>
       </p:ext>
     </p:extLst>
   </p:cSld>
@@ -1607,7 +1607,7 @@
           <a:p>
             <a:fld id="{AE7DD7B4-6F0D-4FE3-8660-A7DE31D2AD67}" type="slidenum">
               <a:rPr lang="ko-KR" altLang="en-US" smtClean="0"/>
-              <a:t>20</a:t>
+              <a:t>19</a:t>
             </a:fld>
             <a:endParaRPr lang="ko-KR" altLang="en-US"/>
           </a:p>
@@ -1616,7 +1616,7 @@
     </p:spTree>
     <p:extLst>
       <p:ext uri="{BB962C8B-B14F-4D97-AF65-F5344CB8AC3E}">
-        <p14:creationId xmlns:p14="http://schemas.microsoft.com/office/powerpoint/2010/main" val="4110645477"/>
+        <p14:creationId xmlns:p14="http://schemas.microsoft.com/office/powerpoint/2010/main" val="1577024467"/>
       </p:ext>
     </p:extLst>
   </p:cSld>
@@ -1691,7 +1691,7 @@
           <a:p>
             <a:fld id="{AE7DD7B4-6F0D-4FE3-8660-A7DE31D2AD67}" type="slidenum">
               <a:rPr lang="ko-KR" altLang="en-US" smtClean="0"/>
-              <a:t>3</a:t>
+              <a:t>2</a:t>
             </a:fld>
             <a:endParaRPr lang="ko-KR" altLang="en-US"/>
           </a:p>
@@ -1700,7 +1700,7 @@
     </p:spTree>
     <p:extLst>
       <p:ext uri="{BB962C8B-B14F-4D97-AF65-F5344CB8AC3E}">
-        <p14:creationId xmlns:p14="http://schemas.microsoft.com/office/powerpoint/2010/main" val="4028412650"/>
+        <p14:creationId xmlns:p14="http://schemas.microsoft.com/office/powerpoint/2010/main" val="2782314945"/>
       </p:ext>
     </p:extLst>
   </p:cSld>
@@ -1775,7 +1775,7 @@
           <a:p>
             <a:fld id="{AE7DD7B4-6F0D-4FE3-8660-A7DE31D2AD67}" type="slidenum">
               <a:rPr lang="ko-KR" altLang="en-US" smtClean="0"/>
-              <a:t>21</a:t>
+              <a:t>20</a:t>
             </a:fld>
             <a:endParaRPr lang="ko-KR" altLang="en-US"/>
           </a:p>
@@ -1784,7 +1784,7 @@
     </p:spTree>
     <p:extLst>
       <p:ext uri="{BB962C8B-B14F-4D97-AF65-F5344CB8AC3E}">
-        <p14:creationId xmlns:p14="http://schemas.microsoft.com/office/powerpoint/2010/main" val="418740216"/>
+        <p14:creationId xmlns:p14="http://schemas.microsoft.com/office/powerpoint/2010/main" val="4110645477"/>
       </p:ext>
     </p:extLst>
   </p:cSld>
@@ -1859,7 +1859,7 @@
           <a:p>
             <a:fld id="{AE7DD7B4-6F0D-4FE3-8660-A7DE31D2AD67}" type="slidenum">
               <a:rPr lang="ko-KR" altLang="en-US" smtClean="0"/>
-              <a:t>22</a:t>
+              <a:t>21</a:t>
             </a:fld>
             <a:endParaRPr lang="ko-KR" altLang="en-US"/>
           </a:p>
@@ -1868,7 +1868,7 @@
     </p:spTree>
     <p:extLst>
       <p:ext uri="{BB962C8B-B14F-4D97-AF65-F5344CB8AC3E}">
-        <p14:creationId xmlns:p14="http://schemas.microsoft.com/office/powerpoint/2010/main" val="3573488600"/>
+        <p14:creationId xmlns:p14="http://schemas.microsoft.com/office/powerpoint/2010/main" val="418740216"/>
       </p:ext>
     </p:extLst>
   </p:cSld>
@@ -1943,7 +1943,7 @@
           <a:p>
             <a:fld id="{AE7DD7B4-6F0D-4FE3-8660-A7DE31D2AD67}" type="slidenum">
               <a:rPr lang="ko-KR" altLang="en-US" smtClean="0"/>
-              <a:t>23</a:t>
+              <a:t>22</a:t>
             </a:fld>
             <a:endParaRPr lang="ko-KR" altLang="en-US"/>
           </a:p>
@@ -1952,7 +1952,7 @@
     </p:spTree>
     <p:extLst>
       <p:ext uri="{BB962C8B-B14F-4D97-AF65-F5344CB8AC3E}">
-        <p14:creationId xmlns:p14="http://schemas.microsoft.com/office/powerpoint/2010/main" val="3949234648"/>
+        <p14:creationId xmlns:p14="http://schemas.microsoft.com/office/powerpoint/2010/main" val="3573488600"/>
       </p:ext>
     </p:extLst>
   </p:cSld>
@@ -2027,7 +2027,7 @@
           <a:p>
             <a:fld id="{AE7DD7B4-6F0D-4FE3-8660-A7DE31D2AD67}" type="slidenum">
               <a:rPr lang="ko-KR" altLang="en-US" smtClean="0"/>
-              <a:t>24</a:t>
+              <a:t>23</a:t>
             </a:fld>
             <a:endParaRPr lang="ko-KR" altLang="en-US"/>
           </a:p>
@@ -2036,7 +2036,7 @@
     </p:spTree>
     <p:extLst>
       <p:ext uri="{BB962C8B-B14F-4D97-AF65-F5344CB8AC3E}">
-        <p14:creationId xmlns:p14="http://schemas.microsoft.com/office/powerpoint/2010/main" val="4114216586"/>
+        <p14:creationId xmlns:p14="http://schemas.microsoft.com/office/powerpoint/2010/main" val="3949234648"/>
       </p:ext>
     </p:extLst>
   </p:cSld>
@@ -2111,7 +2111,7 @@
           <a:p>
             <a:fld id="{AE7DD7B4-6F0D-4FE3-8660-A7DE31D2AD67}" type="slidenum">
               <a:rPr lang="ko-KR" altLang="en-US" smtClean="0"/>
-              <a:t>25</a:t>
+              <a:t>24</a:t>
             </a:fld>
             <a:endParaRPr lang="ko-KR" altLang="en-US"/>
           </a:p>
@@ -2120,7 +2120,7 @@
     </p:spTree>
     <p:extLst>
       <p:ext uri="{BB962C8B-B14F-4D97-AF65-F5344CB8AC3E}">
-        <p14:creationId xmlns:p14="http://schemas.microsoft.com/office/powerpoint/2010/main" val="1572405023"/>
+        <p14:creationId xmlns:p14="http://schemas.microsoft.com/office/powerpoint/2010/main" val="4114216586"/>
       </p:ext>
     </p:extLst>
   </p:cSld>
@@ -2195,7 +2195,7 @@
           <a:p>
             <a:fld id="{AE7DD7B4-6F0D-4FE3-8660-A7DE31D2AD67}" type="slidenum">
               <a:rPr lang="ko-KR" altLang="en-US" smtClean="0"/>
-              <a:t>26</a:t>
+              <a:t>25</a:t>
             </a:fld>
             <a:endParaRPr lang="ko-KR" altLang="en-US"/>
           </a:p>
@@ -2204,7 +2204,7 @@
     </p:spTree>
     <p:extLst>
       <p:ext uri="{BB962C8B-B14F-4D97-AF65-F5344CB8AC3E}">
-        <p14:creationId xmlns:p14="http://schemas.microsoft.com/office/powerpoint/2010/main" val="1593540031"/>
+        <p14:creationId xmlns:p14="http://schemas.microsoft.com/office/powerpoint/2010/main" val="1572405023"/>
       </p:ext>
     </p:extLst>
   </p:cSld>
@@ -2279,7 +2279,7 @@
           <a:p>
             <a:fld id="{AE7DD7B4-6F0D-4FE3-8660-A7DE31D2AD67}" type="slidenum">
               <a:rPr lang="ko-KR" altLang="en-US" smtClean="0"/>
-              <a:t>27</a:t>
+              <a:t>26</a:t>
             </a:fld>
             <a:endParaRPr lang="ko-KR" altLang="en-US"/>
           </a:p>
@@ -2288,7 +2288,7 @@
     </p:spTree>
     <p:extLst>
       <p:ext uri="{BB962C8B-B14F-4D97-AF65-F5344CB8AC3E}">
-        <p14:creationId xmlns:p14="http://schemas.microsoft.com/office/powerpoint/2010/main" val="2855777900"/>
+        <p14:creationId xmlns:p14="http://schemas.microsoft.com/office/powerpoint/2010/main" val="1593540031"/>
       </p:ext>
     </p:extLst>
   </p:cSld>
@@ -2363,7 +2363,7 @@
           <a:p>
             <a:fld id="{AE7DD7B4-6F0D-4FE3-8660-A7DE31D2AD67}" type="slidenum">
               <a:rPr lang="ko-KR" altLang="en-US" smtClean="0"/>
-              <a:t>28</a:t>
+              <a:t>27</a:t>
             </a:fld>
             <a:endParaRPr lang="ko-KR" altLang="en-US"/>
           </a:p>
@@ -2372,7 +2372,7 @@
     </p:spTree>
     <p:extLst>
       <p:ext uri="{BB962C8B-B14F-4D97-AF65-F5344CB8AC3E}">
-        <p14:creationId xmlns:p14="http://schemas.microsoft.com/office/powerpoint/2010/main" val="3257936186"/>
+        <p14:creationId xmlns:p14="http://schemas.microsoft.com/office/powerpoint/2010/main" val="2855777900"/>
       </p:ext>
     </p:extLst>
   </p:cSld>
@@ -2447,7 +2447,7 @@
           <a:p>
             <a:fld id="{AE7DD7B4-6F0D-4FE3-8660-A7DE31D2AD67}" type="slidenum">
               <a:rPr lang="ko-KR" altLang="en-US" smtClean="0"/>
-              <a:t>29</a:t>
+              <a:t>28</a:t>
             </a:fld>
             <a:endParaRPr lang="ko-KR" altLang="en-US"/>
           </a:p>
@@ -2456,7 +2456,7 @@
     </p:spTree>
     <p:extLst>
       <p:ext uri="{BB962C8B-B14F-4D97-AF65-F5344CB8AC3E}">
-        <p14:creationId xmlns:p14="http://schemas.microsoft.com/office/powerpoint/2010/main" val="929712035"/>
+        <p14:creationId xmlns:p14="http://schemas.microsoft.com/office/powerpoint/2010/main" val="3257936186"/>
       </p:ext>
     </p:extLst>
   </p:cSld>
@@ -2531,7 +2531,7 @@
           <a:p>
             <a:fld id="{AE7DD7B4-6F0D-4FE3-8660-A7DE31D2AD67}" type="slidenum">
               <a:rPr lang="ko-KR" altLang="en-US" smtClean="0"/>
-              <a:t>30</a:t>
+              <a:t>29</a:t>
             </a:fld>
             <a:endParaRPr lang="ko-KR" altLang="en-US"/>
           </a:p>
@@ -2540,7 +2540,7 @@
     </p:spTree>
     <p:extLst>
       <p:ext uri="{BB962C8B-B14F-4D97-AF65-F5344CB8AC3E}">
-        <p14:creationId xmlns:p14="http://schemas.microsoft.com/office/powerpoint/2010/main" val="1433539833"/>
+        <p14:creationId xmlns:p14="http://schemas.microsoft.com/office/powerpoint/2010/main" val="929712035"/>
       </p:ext>
     </p:extLst>
   </p:cSld>
@@ -2615,7 +2615,7 @@
           <a:p>
             <a:fld id="{AE7DD7B4-6F0D-4FE3-8660-A7DE31D2AD67}" type="slidenum">
               <a:rPr lang="ko-KR" altLang="en-US" smtClean="0"/>
-              <a:t>4</a:t>
+              <a:t>3</a:t>
             </a:fld>
             <a:endParaRPr lang="ko-KR" altLang="en-US"/>
           </a:p>
@@ -2624,7 +2624,7 @@
     </p:spTree>
     <p:extLst>
       <p:ext uri="{BB962C8B-B14F-4D97-AF65-F5344CB8AC3E}">
-        <p14:creationId xmlns:p14="http://schemas.microsoft.com/office/powerpoint/2010/main" val="3963715982"/>
+        <p14:creationId xmlns:p14="http://schemas.microsoft.com/office/powerpoint/2010/main" val="4028412650"/>
       </p:ext>
     </p:extLst>
   </p:cSld>
@@ -2699,7 +2699,7 @@
           <a:p>
             <a:fld id="{AE7DD7B4-6F0D-4FE3-8660-A7DE31D2AD67}" type="slidenum">
               <a:rPr lang="ko-KR" altLang="en-US" smtClean="0"/>
-              <a:t>31</a:t>
+              <a:t>30</a:t>
             </a:fld>
             <a:endParaRPr lang="ko-KR" altLang="en-US"/>
           </a:p>
@@ -2708,7 +2708,7 @@
     </p:spTree>
     <p:extLst>
       <p:ext uri="{BB962C8B-B14F-4D97-AF65-F5344CB8AC3E}">
-        <p14:creationId xmlns:p14="http://schemas.microsoft.com/office/powerpoint/2010/main" val="3108268112"/>
+        <p14:creationId xmlns:p14="http://schemas.microsoft.com/office/powerpoint/2010/main" val="1433539833"/>
       </p:ext>
     </p:extLst>
   </p:cSld>
@@ -2783,7 +2783,7 @@
           <a:p>
             <a:fld id="{AE7DD7B4-6F0D-4FE3-8660-A7DE31D2AD67}" type="slidenum">
               <a:rPr lang="ko-KR" altLang="en-US" smtClean="0"/>
-              <a:t>32</a:t>
+              <a:t>31</a:t>
             </a:fld>
             <a:endParaRPr lang="ko-KR" altLang="en-US"/>
           </a:p>
@@ -2792,7 +2792,7 @@
     </p:spTree>
     <p:extLst>
       <p:ext uri="{BB962C8B-B14F-4D97-AF65-F5344CB8AC3E}">
-        <p14:creationId xmlns:p14="http://schemas.microsoft.com/office/powerpoint/2010/main" val="878316881"/>
+        <p14:creationId xmlns:p14="http://schemas.microsoft.com/office/powerpoint/2010/main" val="3108268112"/>
       </p:ext>
     </p:extLst>
   </p:cSld>
@@ -2867,7 +2867,7 @@
           <a:p>
             <a:fld id="{AE7DD7B4-6F0D-4FE3-8660-A7DE31D2AD67}" type="slidenum">
               <a:rPr lang="ko-KR" altLang="en-US" smtClean="0"/>
-              <a:t>33</a:t>
+              <a:t>32</a:t>
             </a:fld>
             <a:endParaRPr lang="ko-KR" altLang="en-US"/>
           </a:p>
@@ -2876,7 +2876,7 @@
     </p:spTree>
     <p:extLst>
       <p:ext uri="{BB962C8B-B14F-4D97-AF65-F5344CB8AC3E}">
-        <p14:creationId xmlns:p14="http://schemas.microsoft.com/office/powerpoint/2010/main" val="578121411"/>
+        <p14:creationId xmlns:p14="http://schemas.microsoft.com/office/powerpoint/2010/main" val="878316881"/>
       </p:ext>
     </p:extLst>
   </p:cSld>
@@ -2951,7 +2951,7 @@
           <a:p>
             <a:fld id="{AE7DD7B4-6F0D-4FE3-8660-A7DE31D2AD67}" type="slidenum">
               <a:rPr lang="ko-KR" altLang="en-US" smtClean="0"/>
-              <a:t>34</a:t>
+              <a:t>33</a:t>
             </a:fld>
             <a:endParaRPr lang="ko-KR" altLang="en-US"/>
           </a:p>
@@ -2960,7 +2960,7 @@
     </p:spTree>
     <p:extLst>
       <p:ext uri="{BB962C8B-B14F-4D97-AF65-F5344CB8AC3E}">
-        <p14:creationId xmlns:p14="http://schemas.microsoft.com/office/powerpoint/2010/main" val="2264682868"/>
+        <p14:creationId xmlns:p14="http://schemas.microsoft.com/office/powerpoint/2010/main" val="578121411"/>
       </p:ext>
     </p:extLst>
   </p:cSld>
@@ -3035,7 +3035,7 @@
           <a:p>
             <a:fld id="{AE7DD7B4-6F0D-4FE3-8660-A7DE31D2AD67}" type="slidenum">
               <a:rPr lang="ko-KR" altLang="en-US" smtClean="0"/>
-              <a:t>35</a:t>
+              <a:t>34</a:t>
             </a:fld>
             <a:endParaRPr lang="ko-KR" altLang="en-US"/>
           </a:p>
@@ -3044,7 +3044,7 @@
     </p:spTree>
     <p:extLst>
       <p:ext uri="{BB962C8B-B14F-4D97-AF65-F5344CB8AC3E}">
-        <p14:creationId xmlns:p14="http://schemas.microsoft.com/office/powerpoint/2010/main" val="1076511097"/>
+        <p14:creationId xmlns:p14="http://schemas.microsoft.com/office/powerpoint/2010/main" val="2264682868"/>
       </p:ext>
     </p:extLst>
   </p:cSld>
@@ -3119,7 +3119,7 @@
           <a:p>
             <a:fld id="{AE7DD7B4-6F0D-4FE3-8660-A7DE31D2AD67}" type="slidenum">
               <a:rPr lang="ko-KR" altLang="en-US" smtClean="0"/>
-              <a:t>36</a:t>
+              <a:t>35</a:t>
             </a:fld>
             <a:endParaRPr lang="ko-KR" altLang="en-US"/>
           </a:p>
@@ -3128,7 +3128,7 @@
     </p:spTree>
     <p:extLst>
       <p:ext uri="{BB962C8B-B14F-4D97-AF65-F5344CB8AC3E}">
-        <p14:creationId xmlns:p14="http://schemas.microsoft.com/office/powerpoint/2010/main" val="3047238642"/>
+        <p14:creationId xmlns:p14="http://schemas.microsoft.com/office/powerpoint/2010/main" val="1076511097"/>
       </p:ext>
     </p:extLst>
   </p:cSld>
@@ -3203,7 +3203,7 @@
           <a:p>
             <a:fld id="{AE7DD7B4-6F0D-4FE3-8660-A7DE31D2AD67}" type="slidenum">
               <a:rPr lang="ko-KR" altLang="en-US" smtClean="0"/>
-              <a:t>37</a:t>
+              <a:t>36</a:t>
             </a:fld>
             <a:endParaRPr lang="ko-KR" altLang="en-US"/>
           </a:p>
@@ -3212,7 +3212,7 @@
     </p:spTree>
     <p:extLst>
       <p:ext uri="{BB962C8B-B14F-4D97-AF65-F5344CB8AC3E}">
-        <p14:creationId xmlns:p14="http://schemas.microsoft.com/office/powerpoint/2010/main" val="3102731263"/>
+        <p14:creationId xmlns:p14="http://schemas.microsoft.com/office/powerpoint/2010/main" val="3047238642"/>
       </p:ext>
     </p:extLst>
   </p:cSld>
@@ -3287,7 +3287,7 @@
           <a:p>
             <a:fld id="{AE7DD7B4-6F0D-4FE3-8660-A7DE31D2AD67}" type="slidenum">
               <a:rPr lang="ko-KR" altLang="en-US" smtClean="0"/>
-              <a:t>38</a:t>
+              <a:t>37</a:t>
             </a:fld>
             <a:endParaRPr lang="ko-KR" altLang="en-US"/>
           </a:p>
@@ -3296,7 +3296,7 @@
     </p:spTree>
     <p:extLst>
       <p:ext uri="{BB962C8B-B14F-4D97-AF65-F5344CB8AC3E}">
-        <p14:creationId xmlns:p14="http://schemas.microsoft.com/office/powerpoint/2010/main" val="1755867241"/>
+        <p14:creationId xmlns:p14="http://schemas.microsoft.com/office/powerpoint/2010/main" val="3102731263"/>
       </p:ext>
     </p:extLst>
   </p:cSld>
@@ -3371,7 +3371,7 @@
           <a:p>
             <a:fld id="{AE7DD7B4-6F0D-4FE3-8660-A7DE31D2AD67}" type="slidenum">
               <a:rPr lang="ko-KR" altLang="en-US" smtClean="0"/>
-              <a:t>39</a:t>
+              <a:t>38</a:t>
             </a:fld>
             <a:endParaRPr lang="ko-KR" altLang="en-US"/>
           </a:p>
@@ -3380,7 +3380,7 @@
     </p:spTree>
     <p:extLst>
       <p:ext uri="{BB962C8B-B14F-4D97-AF65-F5344CB8AC3E}">
-        <p14:creationId xmlns:p14="http://schemas.microsoft.com/office/powerpoint/2010/main" val="3519173124"/>
+        <p14:creationId xmlns:p14="http://schemas.microsoft.com/office/powerpoint/2010/main" val="1755867241"/>
       </p:ext>
     </p:extLst>
   </p:cSld>
@@ -3455,7 +3455,7 @@
           <a:p>
             <a:fld id="{AE7DD7B4-6F0D-4FE3-8660-A7DE31D2AD67}" type="slidenum">
               <a:rPr lang="ko-KR" altLang="en-US" smtClean="0"/>
-              <a:t>40</a:t>
+              <a:t>39</a:t>
             </a:fld>
             <a:endParaRPr lang="ko-KR" altLang="en-US"/>
           </a:p>
@@ -3464,7 +3464,7 @@
     </p:spTree>
     <p:extLst>
       <p:ext uri="{BB962C8B-B14F-4D97-AF65-F5344CB8AC3E}">
-        <p14:creationId xmlns:p14="http://schemas.microsoft.com/office/powerpoint/2010/main" val="1532700292"/>
+        <p14:creationId xmlns:p14="http://schemas.microsoft.com/office/powerpoint/2010/main" val="3519173124"/>
       </p:ext>
     </p:extLst>
   </p:cSld>
@@ -3539,7 +3539,7 @@
           <a:p>
             <a:fld id="{AE7DD7B4-6F0D-4FE3-8660-A7DE31D2AD67}" type="slidenum">
               <a:rPr lang="ko-KR" altLang="en-US" smtClean="0"/>
-              <a:t>5</a:t>
+              <a:t>4</a:t>
             </a:fld>
             <a:endParaRPr lang="ko-KR" altLang="en-US"/>
           </a:p>
@@ -3548,7 +3548,7 @@
     </p:spTree>
     <p:extLst>
       <p:ext uri="{BB962C8B-B14F-4D97-AF65-F5344CB8AC3E}">
-        <p14:creationId xmlns:p14="http://schemas.microsoft.com/office/powerpoint/2010/main" val="237680054"/>
+        <p14:creationId xmlns:p14="http://schemas.microsoft.com/office/powerpoint/2010/main" val="3963715982"/>
       </p:ext>
     </p:extLst>
   </p:cSld>
@@ -3623,7 +3623,7 @@
           <a:p>
             <a:fld id="{AE7DD7B4-6F0D-4FE3-8660-A7DE31D2AD67}" type="slidenum">
               <a:rPr lang="ko-KR" altLang="en-US" smtClean="0"/>
-              <a:t>41</a:t>
+              <a:t>40</a:t>
             </a:fld>
             <a:endParaRPr lang="ko-KR" altLang="en-US"/>
           </a:p>
@@ -3632,7 +3632,7 @@
     </p:spTree>
     <p:extLst>
       <p:ext uri="{BB962C8B-B14F-4D97-AF65-F5344CB8AC3E}">
-        <p14:creationId xmlns:p14="http://schemas.microsoft.com/office/powerpoint/2010/main" val="1971787003"/>
+        <p14:creationId xmlns:p14="http://schemas.microsoft.com/office/powerpoint/2010/main" val="1532700292"/>
       </p:ext>
     </p:extLst>
   </p:cSld>
@@ -3707,7 +3707,7 @@
           <a:p>
             <a:fld id="{AE7DD7B4-6F0D-4FE3-8660-A7DE31D2AD67}" type="slidenum">
               <a:rPr lang="ko-KR" altLang="en-US" smtClean="0"/>
-              <a:t>42</a:t>
+              <a:t>41</a:t>
             </a:fld>
             <a:endParaRPr lang="ko-KR" altLang="en-US"/>
           </a:p>
@@ -3716,7 +3716,7 @@
     </p:spTree>
     <p:extLst>
       <p:ext uri="{BB962C8B-B14F-4D97-AF65-F5344CB8AC3E}">
-        <p14:creationId xmlns:p14="http://schemas.microsoft.com/office/powerpoint/2010/main" val="236272075"/>
+        <p14:creationId xmlns:p14="http://schemas.microsoft.com/office/powerpoint/2010/main" val="1971787003"/>
       </p:ext>
     </p:extLst>
   </p:cSld>
@@ -3791,7 +3791,7 @@
           <a:p>
             <a:fld id="{AE7DD7B4-6F0D-4FE3-8660-A7DE31D2AD67}" type="slidenum">
               <a:rPr lang="ko-KR" altLang="en-US" smtClean="0"/>
-              <a:t>43</a:t>
+              <a:t>42</a:t>
             </a:fld>
             <a:endParaRPr lang="ko-KR" altLang="en-US"/>
           </a:p>
@@ -3800,7 +3800,7 @@
     </p:spTree>
     <p:extLst>
       <p:ext uri="{BB962C8B-B14F-4D97-AF65-F5344CB8AC3E}">
-        <p14:creationId xmlns:p14="http://schemas.microsoft.com/office/powerpoint/2010/main" val="3990196770"/>
+        <p14:creationId xmlns:p14="http://schemas.microsoft.com/office/powerpoint/2010/main" val="236272075"/>
       </p:ext>
     </p:extLst>
   </p:cSld>
@@ -3875,7 +3875,7 @@
           <a:p>
             <a:fld id="{AE7DD7B4-6F0D-4FE3-8660-A7DE31D2AD67}" type="slidenum">
               <a:rPr lang="ko-KR" altLang="en-US" smtClean="0"/>
-              <a:t>44</a:t>
+              <a:t>43</a:t>
             </a:fld>
             <a:endParaRPr lang="ko-KR" altLang="en-US"/>
           </a:p>
@@ -3884,7 +3884,7 @@
     </p:spTree>
     <p:extLst>
       <p:ext uri="{BB962C8B-B14F-4D97-AF65-F5344CB8AC3E}">
-        <p14:creationId xmlns:p14="http://schemas.microsoft.com/office/powerpoint/2010/main" val="2549567726"/>
+        <p14:creationId xmlns:p14="http://schemas.microsoft.com/office/powerpoint/2010/main" val="3990196770"/>
       </p:ext>
     </p:extLst>
   </p:cSld>
@@ -3959,7 +3959,7 @@
           <a:p>
             <a:fld id="{AE7DD7B4-6F0D-4FE3-8660-A7DE31D2AD67}" type="slidenum">
               <a:rPr lang="ko-KR" altLang="en-US" smtClean="0"/>
-              <a:t>45</a:t>
+              <a:t>44</a:t>
             </a:fld>
             <a:endParaRPr lang="ko-KR" altLang="en-US"/>
           </a:p>
@@ -3968,7 +3968,7 @@
     </p:spTree>
     <p:extLst>
       <p:ext uri="{BB962C8B-B14F-4D97-AF65-F5344CB8AC3E}">
-        <p14:creationId xmlns:p14="http://schemas.microsoft.com/office/powerpoint/2010/main" val="2706889425"/>
+        <p14:creationId xmlns:p14="http://schemas.microsoft.com/office/powerpoint/2010/main" val="2549567726"/>
       </p:ext>
     </p:extLst>
   </p:cSld>
@@ -4043,7 +4043,7 @@
           <a:p>
             <a:fld id="{AE7DD7B4-6F0D-4FE3-8660-A7DE31D2AD67}" type="slidenum">
               <a:rPr lang="ko-KR" altLang="en-US" smtClean="0"/>
-              <a:t>46</a:t>
+              <a:t>45</a:t>
             </a:fld>
             <a:endParaRPr lang="ko-KR" altLang="en-US"/>
           </a:p>
@@ -4052,7 +4052,7 @@
     </p:spTree>
     <p:extLst>
       <p:ext uri="{BB962C8B-B14F-4D97-AF65-F5344CB8AC3E}">
-        <p14:creationId xmlns:p14="http://schemas.microsoft.com/office/powerpoint/2010/main" val="996712787"/>
+        <p14:creationId xmlns:p14="http://schemas.microsoft.com/office/powerpoint/2010/main" val="2706889425"/>
       </p:ext>
     </p:extLst>
   </p:cSld>
@@ -4127,6 +4127,90 @@
           <a:p>
             <a:fld id="{AE7DD7B4-6F0D-4FE3-8660-A7DE31D2AD67}" type="slidenum">
               <a:rPr lang="ko-KR" altLang="en-US" smtClean="0"/>
+              <a:t>46</a:t>
+            </a:fld>
+            <a:endParaRPr lang="ko-KR" altLang="en-US"/>
+          </a:p>
+        </p:txBody>
+      </p:sp>
+    </p:spTree>
+    <p:extLst>
+      <p:ext uri="{BB962C8B-B14F-4D97-AF65-F5344CB8AC3E}">
+        <p14:creationId xmlns:p14="http://schemas.microsoft.com/office/powerpoint/2010/main" val="996712787"/>
+      </p:ext>
+    </p:extLst>
+  </p:cSld>
+  <p:clrMapOvr>
+    <a:masterClrMapping/>
+  </p:clrMapOvr>
+</p:notes>
+</file>
+
+<file path=ppt/notesSlides/notesSlide47.xml><?xml version="1.0" encoding="utf-8"?>
+<p:notes xmlns:a="http://schemas.openxmlformats.org/drawingml/2006/main" xmlns:r="http://schemas.openxmlformats.org/officeDocument/2006/relationships" xmlns:p="http://schemas.openxmlformats.org/presentationml/2006/main">
+  <p:cSld>
+    <p:spTree>
+      <p:nvGrpSpPr>
+        <p:cNvPr id="1" name=""/>
+        <p:cNvGrpSpPr/>
+        <p:nvPr/>
+      </p:nvGrpSpPr>
+      <p:grpSpPr>
+        <a:xfrm>
+          <a:off x="0" y="0"/>
+          <a:ext cx="0" cy="0"/>
+          <a:chOff x="0" y="0"/>
+          <a:chExt cx="0" cy="0"/>
+        </a:xfrm>
+      </p:grpSpPr>
+      <p:sp>
+        <p:nvSpPr>
+          <p:cNvPr id="2" name="슬라이드 이미지 개체 틀 1"/>
+          <p:cNvSpPr>
+            <a:spLocks noGrp="1" noRot="1" noChangeAspect="1"/>
+          </p:cNvSpPr>
+          <p:nvPr>
+            <p:ph type="sldImg"/>
+          </p:nvPr>
+        </p:nvSpPr>
+        <p:spPr/>
+      </p:sp>
+      <p:sp>
+        <p:nvSpPr>
+          <p:cNvPr id="3" name="슬라이드 노트 개체 틀 2"/>
+          <p:cNvSpPr>
+            <a:spLocks noGrp="1"/>
+          </p:cNvSpPr>
+          <p:nvPr>
+            <p:ph type="body" idx="1"/>
+          </p:nvPr>
+        </p:nvSpPr>
+        <p:spPr/>
+        <p:txBody>
+          <a:bodyPr/>
+          <a:lstStyle/>
+          <a:p>
+            <a:endParaRPr lang="ko-KR" altLang="en-US" dirty="0"/>
+          </a:p>
+        </p:txBody>
+      </p:sp>
+      <p:sp>
+        <p:nvSpPr>
+          <p:cNvPr id="4" name="슬라이드 번호 개체 틀 3"/>
+          <p:cNvSpPr>
+            <a:spLocks noGrp="1"/>
+          </p:cNvSpPr>
+          <p:nvPr>
+            <p:ph type="sldNum" sz="quarter" idx="10"/>
+          </p:nvPr>
+        </p:nvSpPr>
+        <p:spPr/>
+        <p:txBody>
+          <a:bodyPr/>
+          <a:lstStyle/>
+          <a:p>
+            <a:fld id="{AE7DD7B4-6F0D-4FE3-8660-A7DE31D2AD67}" type="slidenum">
+              <a:rPr lang="ko-KR" altLang="en-US" smtClean="0"/>
               <a:t>47</a:t>
             </a:fld>
             <a:endParaRPr lang="ko-KR" altLang="en-US"/>
@@ -4146,7 +4230,7 @@
 </p:notes>
 </file>
 
-<file path=ppt/notesSlides/notesSlide47.xml><?xml version="1.0" encoding="utf-8"?>
+<file path=ppt/notesSlides/notesSlide48.xml><?xml version="1.0" encoding="utf-8"?>
 <p:notes xmlns:a="http://schemas.openxmlformats.org/drawingml/2006/main" xmlns:r="http://schemas.openxmlformats.org/officeDocument/2006/relationships" xmlns:p="http://schemas.openxmlformats.org/presentationml/2006/main">
   <p:cSld>
     <p:spTree>
@@ -4295,7 +4379,7 @@
           <a:p>
             <a:fld id="{AE7DD7B4-6F0D-4FE3-8660-A7DE31D2AD67}" type="slidenum">
               <a:rPr lang="ko-KR" altLang="en-US" smtClean="0"/>
-              <a:t>6</a:t>
+              <a:t>5</a:t>
             </a:fld>
             <a:endParaRPr lang="ko-KR" altLang="en-US"/>
           </a:p>
@@ -4304,7 +4388,7 @@
     </p:spTree>
     <p:extLst>
       <p:ext uri="{BB962C8B-B14F-4D97-AF65-F5344CB8AC3E}">
-        <p14:creationId xmlns:p14="http://schemas.microsoft.com/office/powerpoint/2010/main" val="3773226949"/>
+        <p14:creationId xmlns:p14="http://schemas.microsoft.com/office/powerpoint/2010/main" val="237680054"/>
       </p:ext>
     </p:extLst>
   </p:cSld>
@@ -4379,7 +4463,7 @@
           <a:p>
             <a:fld id="{AE7DD7B4-6F0D-4FE3-8660-A7DE31D2AD67}" type="slidenum">
               <a:rPr lang="ko-KR" altLang="en-US" smtClean="0"/>
-              <a:t>7</a:t>
+              <a:t>6</a:t>
             </a:fld>
             <a:endParaRPr lang="ko-KR" altLang="en-US"/>
           </a:p>
@@ -4388,7 +4472,7 @@
     </p:spTree>
     <p:extLst>
       <p:ext uri="{BB962C8B-B14F-4D97-AF65-F5344CB8AC3E}">
-        <p14:creationId xmlns:p14="http://schemas.microsoft.com/office/powerpoint/2010/main" val="2641369844"/>
+        <p14:creationId xmlns:p14="http://schemas.microsoft.com/office/powerpoint/2010/main" val="3773226949"/>
       </p:ext>
     </p:extLst>
   </p:cSld>
@@ -4463,7 +4547,7 @@
           <a:p>
             <a:fld id="{AE7DD7B4-6F0D-4FE3-8660-A7DE31D2AD67}" type="slidenum">
               <a:rPr lang="ko-KR" altLang="en-US" smtClean="0"/>
-              <a:t>8</a:t>
+              <a:t>7</a:t>
             </a:fld>
             <a:endParaRPr lang="ko-KR" altLang="en-US"/>
           </a:p>
@@ -4472,7 +4556,7 @@
     </p:spTree>
     <p:extLst>
       <p:ext uri="{BB962C8B-B14F-4D97-AF65-F5344CB8AC3E}">
-        <p14:creationId xmlns:p14="http://schemas.microsoft.com/office/powerpoint/2010/main" val="3103560587"/>
+        <p14:creationId xmlns:p14="http://schemas.microsoft.com/office/powerpoint/2010/main" val="2641369844"/>
       </p:ext>
     </p:extLst>
   </p:cSld>
@@ -4547,7 +4631,7 @@
           <a:p>
             <a:fld id="{AE7DD7B4-6F0D-4FE3-8660-A7DE31D2AD67}" type="slidenum">
               <a:rPr lang="ko-KR" altLang="en-US" smtClean="0"/>
-              <a:t>9</a:t>
+              <a:t>8</a:t>
             </a:fld>
             <a:endParaRPr lang="ko-KR" altLang="en-US"/>
           </a:p>
@@ -4556,7 +4640,7 @@
     </p:spTree>
     <p:extLst>
       <p:ext uri="{BB962C8B-B14F-4D97-AF65-F5344CB8AC3E}">
-        <p14:creationId xmlns:p14="http://schemas.microsoft.com/office/powerpoint/2010/main" val="2941731881"/>
+        <p14:creationId xmlns:p14="http://schemas.microsoft.com/office/powerpoint/2010/main" val="3103560587"/>
       </p:ext>
     </p:extLst>
   </p:cSld>
@@ -4631,7 +4715,7 @@
           <a:p>
             <a:fld id="{AE7DD7B4-6F0D-4FE3-8660-A7DE31D2AD67}" type="slidenum">
               <a:rPr lang="ko-KR" altLang="en-US" smtClean="0"/>
-              <a:t>10</a:t>
+              <a:t>9</a:t>
             </a:fld>
             <a:endParaRPr lang="ko-KR" altLang="en-US"/>
           </a:p>
@@ -4640,7 +4724,7 @@
     </p:spTree>
     <p:extLst>
       <p:ext uri="{BB962C8B-B14F-4D97-AF65-F5344CB8AC3E}">
-        <p14:creationId xmlns:p14="http://schemas.microsoft.com/office/powerpoint/2010/main" val="4155317091"/>
+        <p14:creationId xmlns:p14="http://schemas.microsoft.com/office/powerpoint/2010/main" val="2941731881"/>
       </p:ext>
     </p:extLst>
   </p:cSld>
@@ -4781,7 +4865,7 @@
           <a:p>
             <a:fld id="{178ADFAC-D890-497A-A497-2A400DD02E74}" type="datetimeFigureOut">
               <a:rPr lang="ko-KR" altLang="en-US" smtClean="0"/>
-              <a:t>2024-04-09</a:t>
+              <a:t>2025-04-07</a:t>
             </a:fld>
             <a:endParaRPr lang="ko-KR" altLang="en-US"/>
           </a:p>
@@ -4951,7 +5035,7 @@
           <a:p>
             <a:fld id="{178ADFAC-D890-497A-A497-2A400DD02E74}" type="datetimeFigureOut">
               <a:rPr lang="ko-KR" altLang="en-US" smtClean="0"/>
-              <a:t>2024-04-09</a:t>
+              <a:t>2025-04-07</a:t>
             </a:fld>
             <a:endParaRPr lang="ko-KR" altLang="en-US"/>
           </a:p>
@@ -5131,7 +5215,7 @@
           <a:p>
             <a:fld id="{178ADFAC-D890-497A-A497-2A400DD02E74}" type="datetimeFigureOut">
               <a:rPr lang="ko-KR" altLang="en-US" smtClean="0"/>
-              <a:t>2024-04-09</a:t>
+              <a:t>2025-04-07</a:t>
             </a:fld>
             <a:endParaRPr lang="ko-KR" altLang="en-US"/>
           </a:p>
@@ -5301,7 +5385,7 @@
           <a:p>
             <a:fld id="{178ADFAC-D890-497A-A497-2A400DD02E74}" type="datetimeFigureOut">
               <a:rPr lang="ko-KR" altLang="en-US" smtClean="0"/>
-              <a:t>2024-04-09</a:t>
+              <a:t>2025-04-07</a:t>
             </a:fld>
             <a:endParaRPr lang="ko-KR" altLang="en-US"/>
           </a:p>
@@ -5545,7 +5629,7 @@
           <a:p>
             <a:fld id="{178ADFAC-D890-497A-A497-2A400DD02E74}" type="datetimeFigureOut">
               <a:rPr lang="ko-KR" altLang="en-US" smtClean="0"/>
-              <a:t>2024-04-09</a:t>
+              <a:t>2025-04-07</a:t>
             </a:fld>
             <a:endParaRPr lang="ko-KR" altLang="en-US"/>
           </a:p>
@@ -5777,7 +5861,7 @@
           <a:p>
             <a:fld id="{178ADFAC-D890-497A-A497-2A400DD02E74}" type="datetimeFigureOut">
               <a:rPr lang="ko-KR" altLang="en-US" smtClean="0"/>
-              <a:t>2024-04-09</a:t>
+              <a:t>2025-04-07</a:t>
             </a:fld>
             <a:endParaRPr lang="ko-KR" altLang="en-US"/>
           </a:p>
@@ -6144,7 +6228,7 @@
           <a:p>
             <a:fld id="{178ADFAC-D890-497A-A497-2A400DD02E74}" type="datetimeFigureOut">
               <a:rPr lang="ko-KR" altLang="en-US" smtClean="0"/>
-              <a:t>2024-04-09</a:t>
+              <a:t>2025-04-07</a:t>
             </a:fld>
             <a:endParaRPr lang="ko-KR" altLang="en-US"/>
           </a:p>
@@ -6262,7 +6346,7 @@
           <a:p>
             <a:fld id="{178ADFAC-D890-497A-A497-2A400DD02E74}" type="datetimeFigureOut">
               <a:rPr lang="ko-KR" altLang="en-US" smtClean="0"/>
-              <a:t>2024-04-09</a:t>
+              <a:t>2025-04-07</a:t>
             </a:fld>
             <a:endParaRPr lang="ko-KR" altLang="en-US"/>
           </a:p>
@@ -6357,7 +6441,7 @@
           <a:p>
             <a:fld id="{178ADFAC-D890-497A-A497-2A400DD02E74}" type="datetimeFigureOut">
               <a:rPr lang="ko-KR" altLang="en-US" smtClean="0"/>
-              <a:t>2024-04-09</a:t>
+              <a:t>2025-04-07</a:t>
             </a:fld>
             <a:endParaRPr lang="ko-KR" altLang="en-US"/>
           </a:p>
@@ -6634,7 +6718,7 @@
           <a:p>
             <a:fld id="{178ADFAC-D890-497A-A497-2A400DD02E74}" type="datetimeFigureOut">
               <a:rPr lang="ko-KR" altLang="en-US" smtClean="0"/>
-              <a:t>2024-04-09</a:t>
+              <a:t>2025-04-07</a:t>
             </a:fld>
             <a:endParaRPr lang="ko-KR" altLang="en-US"/>
           </a:p>
@@ -6891,7 +6975,7 @@
           <a:p>
             <a:fld id="{178ADFAC-D890-497A-A497-2A400DD02E74}" type="datetimeFigureOut">
               <a:rPr lang="ko-KR" altLang="en-US" smtClean="0"/>
-              <a:t>2024-04-09</a:t>
+              <a:t>2025-04-07</a:t>
             </a:fld>
             <a:endParaRPr lang="ko-KR" altLang="en-US"/>
           </a:p>
@@ -7104,7 +7188,7 @@
           <a:p>
             <a:fld id="{178ADFAC-D890-497A-A497-2A400DD02E74}" type="datetimeFigureOut">
               <a:rPr lang="ko-KR" altLang="en-US" smtClean="0"/>
-              <a:t>2024-04-09</a:t>
+              <a:t>2025-04-07</a:t>
             </a:fld>
             <a:endParaRPr lang="ko-KR" altLang="en-US"/>
           </a:p>
@@ -7628,7 +7712,7 @@
         <p:spPr>
           <a:xfrm>
             <a:off x="1075166" y="3978237"/>
-            <a:ext cx="6941127" cy="1384995"/>
+            <a:ext cx="6941127" cy="1314462"/>
           </a:xfrm>
           <a:prstGeom prst="rect">
             <a:avLst/>
@@ -7678,7 +7762,7 @@
                 <a:latin typeface="Arial Narrow" panose="020B0606020202030204" pitchFamily="34" charset="0"/>
                 <a:cs typeface="Times New Roman" panose="02020603050405020304" pitchFamily="18" charset="0"/>
               </a:rPr>
-              <a:t>Assistant professor </a:t>
+              <a:t>Associate professor </a:t>
             </a:r>
           </a:p>
         </p:txBody>
